--- a/output/images/paper3_scheme.pptx
+++ b/output/images/paper3_scheme.pptx
@@ -344,86 +344,6 @@
           <pc:docMk/>
           <pc:sldMk cId="723249223" sldId="327"/>
         </pc:sldMkLst>
-        <pc:spChg chg="mod">
-          <ac:chgData name="Julio César Iturra Sanhueza" userId="e2de3052-3501-452a-9806-eb4e3c41687c" providerId="ADAL" clId="{9573727F-4811-45D9-A52A-5B3A3BCA0CD9}" dt="2026-03-24T10:09:05.744" v="1024" actId="2711"/>
-          <ac:spMkLst>
-            <pc:docMk/>
-            <pc:sldMk cId="723249223" sldId="327"/>
-            <ac:spMk id="4" creationId="{35B581AD-3D76-B047-07A6-A183CF589AB8}"/>
-          </ac:spMkLst>
-        </pc:spChg>
-        <pc:spChg chg="add mod">
-          <ac:chgData name="Julio César Iturra Sanhueza" userId="e2de3052-3501-452a-9806-eb4e3c41687c" providerId="ADAL" clId="{9573727F-4811-45D9-A52A-5B3A3BCA0CD9}" dt="2026-03-24T10:09:05.744" v="1024" actId="2711"/>
-          <ac:spMkLst>
-            <pc:docMk/>
-            <pc:sldMk cId="723249223" sldId="327"/>
-            <ac:spMk id="5" creationId="{3BCE2E96-C589-7EBD-3E3C-892D6743E3D0}"/>
-          </ac:spMkLst>
-        </pc:spChg>
-        <pc:spChg chg="add del mod">
-          <ac:chgData name="Julio César Iturra Sanhueza" userId="e2de3052-3501-452a-9806-eb4e3c41687c" providerId="ADAL" clId="{9573727F-4811-45D9-A52A-5B3A3BCA0CD9}" dt="2026-03-24T10:09:05.744" v="1024" actId="2711"/>
-          <ac:spMkLst>
-            <pc:docMk/>
-            <pc:sldMk cId="723249223" sldId="327"/>
-            <ac:spMk id="9" creationId="{F9E96F2C-10C7-0D70-0D98-9D4B4CF8B55E}"/>
-          </ac:spMkLst>
-        </pc:spChg>
-        <pc:spChg chg="add mod">
-          <ac:chgData name="Julio César Iturra Sanhueza" userId="e2de3052-3501-452a-9806-eb4e3c41687c" providerId="ADAL" clId="{9573727F-4811-45D9-A52A-5B3A3BCA0CD9}" dt="2026-03-24T10:09:05.744" v="1024" actId="2711"/>
-          <ac:spMkLst>
-            <pc:docMk/>
-            <pc:sldMk cId="723249223" sldId="327"/>
-            <ac:spMk id="24" creationId="{548D0691-4728-659F-AB43-18B5DD8BA13F}"/>
-          </ac:spMkLst>
-        </pc:spChg>
-        <pc:spChg chg="add mod">
-          <ac:chgData name="Julio César Iturra Sanhueza" userId="e2de3052-3501-452a-9806-eb4e3c41687c" providerId="ADAL" clId="{9573727F-4811-45D9-A52A-5B3A3BCA0CD9}" dt="2026-03-24T10:09:05.744" v="1024" actId="2711"/>
-          <ac:spMkLst>
-            <pc:docMk/>
-            <pc:sldMk cId="723249223" sldId="327"/>
-            <ac:spMk id="36" creationId="{B4B51116-0A09-948A-9476-F8D50D29F792}"/>
-          </ac:spMkLst>
-        </pc:spChg>
-        <pc:spChg chg="add mod">
-          <ac:chgData name="Julio César Iturra Sanhueza" userId="e2de3052-3501-452a-9806-eb4e3c41687c" providerId="ADAL" clId="{9573727F-4811-45D9-A52A-5B3A3BCA0CD9}" dt="2026-03-24T10:09:05.744" v="1024" actId="2711"/>
-          <ac:spMkLst>
-            <pc:docMk/>
-            <pc:sldMk cId="723249223" sldId="327"/>
-            <ac:spMk id="46" creationId="{A3E31A86-1120-39A4-D871-F54E2AEF607E}"/>
-          </ac:spMkLst>
-        </pc:spChg>
-        <pc:spChg chg="add mod ord">
-          <ac:chgData name="Julio César Iturra Sanhueza" userId="e2de3052-3501-452a-9806-eb4e3c41687c" providerId="ADAL" clId="{9573727F-4811-45D9-A52A-5B3A3BCA0CD9}" dt="2026-03-24T10:09:05.744" v="1024" actId="2711"/>
-          <ac:spMkLst>
-            <pc:docMk/>
-            <pc:sldMk cId="723249223" sldId="327"/>
-            <ac:spMk id="47" creationId="{C9931CF8-F02C-0954-352E-3C48585135B6}"/>
-          </ac:spMkLst>
-        </pc:spChg>
-        <pc:cxnChg chg="add mod">
-          <ac:chgData name="Julio César Iturra Sanhueza" userId="e2de3052-3501-452a-9806-eb4e3c41687c" providerId="ADAL" clId="{9573727F-4811-45D9-A52A-5B3A3BCA0CD9}" dt="2026-03-24T10:09:05.744" v="1024" actId="2711"/>
-          <ac:cxnSpMkLst>
-            <pc:docMk/>
-            <pc:sldMk cId="723249223" sldId="327"/>
-            <ac:cxnSpMk id="10" creationId="{36237E22-1DDE-4D4E-6A09-85AB865572CE}"/>
-          </ac:cxnSpMkLst>
-        </pc:cxnChg>
-        <pc:cxnChg chg="add mod">
-          <ac:chgData name="Julio César Iturra Sanhueza" userId="e2de3052-3501-452a-9806-eb4e3c41687c" providerId="ADAL" clId="{9573727F-4811-45D9-A52A-5B3A3BCA0CD9}" dt="2026-03-24T10:09:05.744" v="1024" actId="2711"/>
-          <ac:cxnSpMkLst>
-            <pc:docMk/>
-            <pc:sldMk cId="723249223" sldId="327"/>
-            <ac:cxnSpMk id="28" creationId="{8CBA71FC-1A37-60E1-20F1-5E575653A50E}"/>
-          </ac:cxnSpMkLst>
-        </pc:cxnChg>
-        <pc:cxnChg chg="add mod">
-          <ac:chgData name="Julio César Iturra Sanhueza" userId="e2de3052-3501-452a-9806-eb4e3c41687c" providerId="ADAL" clId="{9573727F-4811-45D9-A52A-5B3A3BCA0CD9}" dt="2026-03-24T10:09:05.744" v="1024" actId="2711"/>
-          <ac:cxnSpMkLst>
-            <pc:docMk/>
-            <pc:sldMk cId="723249223" sldId="327"/>
-            <ac:cxnSpMk id="40" creationId="{56F5D1F6-61F5-84D4-B567-BCA2014E0E98}"/>
-          </ac:cxnSpMkLst>
-        </pc:cxnChg>
       </pc:sldChg>
     </pc:docChg>
   </pc:docChgLst>
@@ -20018,7 +19938,7 @@
         </p:nvSpPr>
         <p:spPr>
           <a:xfrm>
-            <a:off x="6685279" y="465233"/>
+            <a:off x="6685279" y="357511"/>
             <a:ext cx="1605280" cy="966047"/>
           </a:xfrm>
           <a:prstGeom prst="ellipse">
@@ -20076,8 +19996,8 @@
         </p:nvCxnSpPr>
         <p:spPr>
           <a:xfrm flipV="1">
-            <a:off x="5447452" y="1431280"/>
-            <a:ext cx="2040467" cy="1478704"/>
+            <a:off x="5447452" y="1323558"/>
+            <a:ext cx="2040467" cy="1586426"/>
           </a:xfrm>
           <a:prstGeom prst="straightConnector1">
             <a:avLst/>
@@ -20119,9 +20039,9 @@
           <p:nvPr/>
         </p:nvCxnSpPr>
         <p:spPr>
-          <a:xfrm>
-            <a:off x="2475654" y="840536"/>
-            <a:ext cx="4209625" cy="107721"/>
+          <a:xfrm flipV="1">
+            <a:off x="2475654" y="840535"/>
+            <a:ext cx="4209625" cy="1"/>
           </a:xfrm>
           <a:prstGeom prst="straightConnector1">
             <a:avLst/>
